--- a/assets/pptx/catalog-601.pptx
+++ b/assets/pptx/catalog-601.pptx
@@ -3283,7 +3283,7 @@
                 <a:ea typeface="Ebrima"/>
                 <a:cs typeface="Ebrima"/>
               </a:rPr>
-              <a:t>በልቤ ከቶ አይበርድም (2x)</a:t>
+              <a:t>በልቤ ከቶ አይበርድም 2x</a:t>
             </a:r>
           </a:p>
         </p:txBody>
@@ -3368,7 +3368,7 @@
                 <a:ea typeface="Ebrima"/>
                 <a:cs typeface="Ebrima"/>
               </a:rPr>
-              <a:t>አቤቱ ፍቅርህ መተኪያ የለው (2x)</a:t>
+              <a:t>አቤቱ ፍቅርህ መተኪያ የለው 2x</a:t>
             </a:r>
           </a:p>
           <a:p>
@@ -3507,7 +3507,7 @@
                 <a:ea typeface="Ebrima"/>
                 <a:cs typeface="Ebrima"/>
               </a:rPr>
-              <a:t>በልቤ ከቶ አይበርድም (2x)</a:t>
+              <a:t>በልቤ ከቶ አይበርድም 2x</a:t>
             </a:r>
           </a:p>
         </p:txBody>
@@ -3592,7 +3592,7 @@
                 <a:ea typeface="Ebrima"/>
                 <a:cs typeface="Ebrima"/>
               </a:rPr>
-              <a:t>ፍቅርህ ሁሌ አዲስ ነው ከልቤ ማይጠፋ (2x)</a:t>
+              <a:t>ፍቅርህ ሁሌ አዲስ ነው ከልቤ ማይጠፋ 2x</a:t>
             </a:r>
           </a:p>
           <a:p>
@@ -3731,7 +3731,7 @@
                 <a:ea typeface="Ebrima"/>
                 <a:cs typeface="Ebrima"/>
               </a:rPr>
-              <a:t>በልቤ ከቶ አይበርድም (2x)</a:t>
+              <a:t>በልቤ ከቶ አይበርድም 2x</a:t>
             </a:r>
           </a:p>
         </p:txBody>
@@ -3816,7 +3816,7 @@
                 <a:ea typeface="Ebrima"/>
                 <a:cs typeface="Ebrima"/>
               </a:rPr>
-              <a:t>መጠጊያዬ ነህ ብሩኩ ጌታ (2x)</a:t>
+              <a:t>መጠጊያዬ ነህ ብሩኩ ጌታ 2x</a:t>
             </a:r>
           </a:p>
           <a:p>
@@ -3955,7 +3955,7 @@
                 <a:ea typeface="Ebrima"/>
                 <a:cs typeface="Ebrima"/>
               </a:rPr>
-              <a:t>በልቤ ከቶ አይበርድም (4x)</a:t>
+              <a:t>በልቤ ከቶ አይበርድም 4x</a:t>
             </a:r>
           </a:p>
         </p:txBody>
